--- a/dist/weeks-2학기/서비스디자인_2학기_02주차_학기시작과개인발표.pptx
+++ b/dist/weeks-2학기/서비스디자인_2학기_02주차_학기시작과개인발표.pptx
@@ -2298,9 +2298,9 @@
                 <a:solidFill>
                   <a:srgbClr val="111111"/>
                 </a:solidFill>
-                <a:latin typeface="Pretendard Black" pitchFamily="34" charset="0"/>
-                <a:ea typeface="Pretendard Black" pitchFamily="34" charset="-122"/>
-                <a:cs typeface="Pretendard Black" pitchFamily="34" charset="-120"/>
+                <a:latin typeface="Pretendard SemiBold" pitchFamily="34" charset="0"/>
+                <a:ea typeface="Pretendard SemiBold" pitchFamily="34" charset="-122"/>
+                <a:cs typeface="Pretendard SemiBold" pitchFamily="34" charset="-120"/>
               </a:rPr>
               <a:t>02</a:t>
             </a:r>
@@ -2448,9 +2448,9 @@
                 <a:solidFill>
                   <a:srgbClr val="111111"/>
                 </a:solidFill>
-                <a:latin typeface="Pretendard Black" pitchFamily="34" charset="0"/>
-                <a:ea typeface="Pretendard Black" pitchFamily="34" charset="-122"/>
-                <a:cs typeface="Pretendard Black" pitchFamily="34" charset="-120"/>
+                <a:latin typeface="Pretendard SemiBold" pitchFamily="34" charset="0"/>
+                <a:ea typeface="Pretendard SemiBold" pitchFamily="34" charset="-122"/>
+                <a:cs typeface="Pretendard SemiBold" pitchFamily="34" charset="-120"/>
               </a:rPr>
               <a:t>2학기 시작 · 개인 발표</a:t>
             </a:r>
@@ -2968,9 +2968,9 @@
                 <a:solidFill>
                   <a:srgbClr val="1B1B1B"/>
                 </a:solidFill>
-                <a:latin typeface="Pretendard Black" pitchFamily="34" charset="0"/>
-                <a:ea typeface="Pretendard Black" pitchFamily="34" charset="-122"/>
-                <a:cs typeface="Pretendard Black" pitchFamily="34" charset="-120"/>
+                <a:latin typeface="Pretendard SemiBold" pitchFamily="34" charset="0"/>
+                <a:ea typeface="Pretendard SemiBold" pitchFamily="34" charset="-122"/>
+                <a:cs typeface="Pretendard SemiBold" pitchFamily="34" charset="-120"/>
               </a:rPr>
               <a:t>02</a:t>
             </a:r>
@@ -3115,9 +3115,9 @@
                 <a:solidFill>
                   <a:srgbClr val="FFFFFF"/>
                 </a:solidFill>
-                <a:latin typeface="Pretendard Black" pitchFamily="34" charset="0"/>
-                <a:ea typeface="Pretendard Black" pitchFamily="34" charset="-122"/>
-                <a:cs typeface="Pretendard Black" pitchFamily="34" charset="-120"/>
+                <a:latin typeface="Pretendard SemiBold" pitchFamily="34" charset="0"/>
+                <a:ea typeface="Pretendard SemiBold" pitchFamily="34" charset="-122"/>
+                <a:cs typeface="Pretendard SemiBold" pitchFamily="34" charset="-120"/>
               </a:rPr>
               <a:t>학기 운영</a:t>
             </a:r>
@@ -3473,9 +3473,9 @@
                 <a:solidFill>
                   <a:srgbClr val="111111"/>
                 </a:solidFill>
-                <a:latin typeface="Pretendard Black" pitchFamily="34" charset="0"/>
-                <a:ea typeface="Pretendard Black" pitchFamily="34" charset="-122"/>
-                <a:cs typeface="Pretendard Black" pitchFamily="34" charset="-120"/>
+                <a:latin typeface="Pretendard SemiBold" pitchFamily="34" charset="0"/>
+                <a:ea typeface="Pretendard SemiBold" pitchFamily="34" charset="-122"/>
+                <a:cs typeface="Pretendard SemiBold" pitchFamily="34" charset="-120"/>
               </a:rPr>
               <a:t>잠기는 시점 세 개</a:t>
             </a:r>
@@ -3643,9 +3643,9 @@
                 <a:solidFill>
                   <a:srgbClr val="111111"/>
                 </a:solidFill>
-                <a:latin typeface="Pretendard Black" pitchFamily="34" charset="0"/>
-                <a:ea typeface="Pretendard Black" pitchFamily="34" charset="-122"/>
-                <a:cs typeface="Pretendard Black" pitchFamily="34" charset="-120"/>
+                <a:latin typeface="Pretendard SemiBold" pitchFamily="34" charset="0"/>
+                <a:ea typeface="Pretendard SemiBold" pitchFamily="34" charset="-122"/>
+                <a:cs typeface="Pretendard SemiBold" pitchFamily="34" charset="-120"/>
               </a:rPr>
               <a:t>작업 범위 확정 · 3주차</a:t>
             </a:r>
@@ -3816,9 +3816,9 @@
                 <a:solidFill>
                   <a:srgbClr val="111111"/>
                 </a:solidFill>
-                <a:latin typeface="Pretendard Black" pitchFamily="34" charset="0"/>
-                <a:ea typeface="Pretendard Black" pitchFamily="34" charset="-122"/>
-                <a:cs typeface="Pretendard Black" pitchFamily="34" charset="-120"/>
+                <a:latin typeface="Pretendard SemiBold" pitchFamily="34" charset="0"/>
+                <a:ea typeface="Pretendard SemiBold" pitchFamily="34" charset="-122"/>
+                <a:cs typeface="Pretendard SemiBold" pitchFamily="34" charset="-120"/>
               </a:rPr>
               <a:t>화면 완성 · 11주차</a:t>
             </a:r>
@@ -3989,9 +3989,9 @@
                 <a:solidFill>
                   <a:srgbClr val="FFFFFF"/>
                 </a:solidFill>
-                <a:latin typeface="Pretendard Black" pitchFamily="34" charset="0"/>
-                <a:ea typeface="Pretendard Black" pitchFamily="34" charset="-122"/>
-                <a:cs typeface="Pretendard Black" pitchFamily="34" charset="-120"/>
+                <a:latin typeface="Pretendard SemiBold" pitchFamily="34" charset="0"/>
+                <a:ea typeface="Pretendard SemiBold" pitchFamily="34" charset="-122"/>
+                <a:cs typeface="Pretendard SemiBold" pitchFamily="34" charset="-120"/>
               </a:rPr>
               <a:t>인쇄 데이터 마감 · 14주차</a:t>
             </a:r>
@@ -4453,9 +4453,9 @@
                 <a:solidFill>
                   <a:srgbClr val="111111"/>
                 </a:solidFill>
-                <a:latin typeface="Pretendard Black" pitchFamily="34" charset="0"/>
-                <a:ea typeface="Pretendard Black" pitchFamily="34" charset="-122"/>
-                <a:cs typeface="Pretendard Black" pitchFamily="34" charset="-120"/>
+                <a:latin typeface="Pretendard SemiBold" pitchFamily="34" charset="0"/>
+                <a:ea typeface="Pretendard SemiBold" pitchFamily="34" charset="-122"/>
+                <a:cs typeface="Pretendard SemiBold" pitchFamily="34" charset="-120"/>
               </a:rPr>
               <a:t>평가</a:t>
             </a:r>
@@ -4556,9 +4556,9 @@
                 <a:solidFill>
                   <a:srgbClr val="111111"/>
                 </a:solidFill>
-                <a:latin typeface="Pretendard Black" pitchFamily="34" charset="0"/>
-                <a:ea typeface="Pretendard Black" pitchFamily="34" charset="-122"/>
-                <a:cs typeface="Pretendard Black" pitchFamily="34" charset="-120"/>
+                <a:latin typeface="Pretendard SemiBold" pitchFamily="34" charset="0"/>
+                <a:ea typeface="Pretendard SemiBold" pitchFamily="34" charset="-122"/>
+                <a:cs typeface="Pretendard SemiBold" pitchFamily="34" charset="-120"/>
               </a:rPr>
               <a:t>과정</a:t>
             </a:r>
@@ -4805,9 +4805,9 @@
                 <a:solidFill>
                   <a:srgbClr val="111111"/>
                 </a:solidFill>
-                <a:latin typeface="Pretendard Black" pitchFamily="34" charset="0"/>
-                <a:ea typeface="Pretendard Black" pitchFamily="34" charset="-122"/>
-                <a:cs typeface="Pretendard Black" pitchFamily="34" charset="-120"/>
+                <a:latin typeface="Pretendard SemiBold" pitchFamily="34" charset="0"/>
+                <a:ea typeface="Pretendard SemiBold" pitchFamily="34" charset="-122"/>
+                <a:cs typeface="Pretendard SemiBold" pitchFamily="34" charset="-120"/>
               </a:rPr>
               <a:t>중간 검증</a:t>
             </a:r>
@@ -5054,9 +5054,9 @@
                 <a:solidFill>
                   <a:srgbClr val="111111"/>
                 </a:solidFill>
-                <a:latin typeface="Pretendard Black" pitchFamily="34" charset="0"/>
-                <a:ea typeface="Pretendard Black" pitchFamily="34" charset="-122"/>
-                <a:cs typeface="Pretendard Black" pitchFamily="34" charset="-120"/>
+                <a:latin typeface="Pretendard SemiBold" pitchFamily="34" charset="0"/>
+                <a:ea typeface="Pretendard SemiBold" pitchFamily="34" charset="-122"/>
+                <a:cs typeface="Pretendard SemiBold" pitchFamily="34" charset="-120"/>
               </a:rPr>
               <a:t>결과물</a:t>
             </a:r>
@@ -5661,9 +5661,9 @@
                 <a:solidFill>
                   <a:srgbClr val="111111"/>
                 </a:solidFill>
-                <a:latin typeface="Pretendard Black" pitchFamily="34" charset="0"/>
-                <a:ea typeface="Pretendard Black" pitchFamily="34" charset="-122"/>
-                <a:cs typeface="Pretendard Black" pitchFamily="34" charset="-120"/>
+                <a:latin typeface="Pretendard SemiBold" pitchFamily="34" charset="0"/>
+                <a:ea typeface="Pretendard SemiBold" pitchFamily="34" charset="-122"/>
+                <a:cs typeface="Pretendard SemiBold" pitchFamily="34" charset="-120"/>
               </a:rPr>
               <a:t>제출물 점검표</a:t>
             </a:r>
@@ -7143,9 +7143,9 @@
                 <a:solidFill>
                   <a:srgbClr val="111111"/>
                 </a:solidFill>
-                <a:latin typeface="Pretendard Black" pitchFamily="34" charset="0"/>
-                <a:ea typeface="Pretendard Black" pitchFamily="34" charset="-122"/>
-                <a:cs typeface="Pretendard Black" pitchFamily="34" charset="-120"/>
+                <a:latin typeface="Pretendard SemiBold" pitchFamily="34" charset="0"/>
+                <a:ea typeface="Pretendard SemiBold" pitchFamily="34" charset="-122"/>
+                <a:cs typeface="Pretendard SemiBold" pitchFamily="34" charset="-120"/>
               </a:rPr>
               <a:t>과제와 다음 주</a:t>
             </a:r>
@@ -7310,9 +7310,9 @@
                 <a:solidFill>
                   <a:srgbClr val="111111"/>
                 </a:solidFill>
-                <a:latin typeface="Pretendard Black" pitchFamily="34" charset="0"/>
-                <a:ea typeface="Pretendard Black" pitchFamily="34" charset="-122"/>
-                <a:cs typeface="Pretendard Black" pitchFamily="34" charset="-120"/>
+                <a:latin typeface="Pretendard SemiBold" pitchFamily="34" charset="0"/>
+                <a:ea typeface="Pretendard SemiBold" pitchFamily="34" charset="-122"/>
+                <a:cs typeface="Pretendard SemiBold" pitchFamily="34" charset="-120"/>
               </a:rPr>
               <a:t>2학기 작업 범위 확정서 1장</a:t>
             </a:r>
@@ -7480,9 +7480,9 @@
                 <a:solidFill>
                   <a:srgbClr val="111111"/>
                 </a:solidFill>
-                <a:latin typeface="Pretendard Black" pitchFamily="34" charset="0"/>
-                <a:ea typeface="Pretendard Black" pitchFamily="34" charset="-122"/>
-                <a:cs typeface="Pretendard Black" pitchFamily="34" charset="-120"/>
+                <a:latin typeface="Pretendard SemiBold" pitchFamily="34" charset="0"/>
+                <a:ea typeface="Pretendard SemiBold" pitchFamily="34" charset="-122"/>
+                <a:cs typeface="Pretendard SemiBold" pitchFamily="34" charset="-120"/>
               </a:rPr>
               <a:t>화면 실측표</a:t>
             </a:r>
@@ -7650,9 +7650,9 @@
                 <a:solidFill>
                   <a:srgbClr val="111111"/>
                 </a:solidFill>
-                <a:latin typeface="Pretendard Black" pitchFamily="34" charset="0"/>
-                <a:ea typeface="Pretendard Black" pitchFamily="34" charset="-122"/>
-                <a:cs typeface="Pretendard Black" pitchFamily="34" charset="-120"/>
+                <a:latin typeface="Pretendard SemiBold" pitchFamily="34" charset="0"/>
+                <a:ea typeface="Pretendard SemiBold" pitchFamily="34" charset="-122"/>
+                <a:cs typeface="Pretendard SemiBold" pitchFamily="34" charset="-120"/>
               </a:rPr>
               <a:t>Figma 파일 정리</a:t>
             </a:r>
@@ -7901,9 +7901,9 @@
                 <a:solidFill>
                   <a:srgbClr val="FFFFFF"/>
                 </a:solidFill>
-                <a:latin typeface="Pretendard Black" pitchFamily="34" charset="0"/>
-                <a:ea typeface="Pretendard Black" pitchFamily="34" charset="-122"/>
-                <a:cs typeface="Pretendard Black" pitchFamily="34" charset="-120"/>
+                <a:latin typeface="Pretendard SemiBold" pitchFamily="34" charset="0"/>
+                <a:ea typeface="Pretendard SemiBold" pitchFamily="34" charset="-122"/>
+                <a:cs typeface="Pretendard SemiBold" pitchFamily="34" charset="-120"/>
               </a:rPr>
               <a:t>하단 GNB · 수치로 짓는 컴포넌트</a:t>
             </a:r>
@@ -8505,9 +8505,9 @@
                 <a:solidFill>
                   <a:srgbClr val="111111"/>
                 </a:solidFill>
-                <a:latin typeface="Pretendard Black" pitchFamily="34" charset="0"/>
-                <a:ea typeface="Pretendard Black" pitchFamily="34" charset="-122"/>
-                <a:cs typeface="Pretendard Black" pitchFamily="34" charset="-120"/>
+                <a:latin typeface="Pretendard SemiBold" pitchFamily="34" charset="0"/>
+                <a:ea typeface="Pretendard SemiBold" pitchFamily="34" charset="-122"/>
+                <a:cs typeface="Pretendard SemiBold" pitchFamily="34" charset="-120"/>
               </a:rPr>
               <a:t>오늘의 목표</a:t>
             </a:r>
@@ -8633,9 +8633,9 @@
                 <a:solidFill>
                   <a:srgbClr val="111111"/>
                 </a:solidFill>
-                <a:latin typeface="Pretendard Black" pitchFamily="34" charset="0"/>
-                <a:ea typeface="Pretendard Black" pitchFamily="34" charset="-122"/>
-                <a:cs typeface="Pretendard Black" pitchFamily="34" charset="-120"/>
+                <a:latin typeface="Pretendard SemiBold" pitchFamily="34" charset="0"/>
+                <a:ea typeface="Pretendard SemiBold" pitchFamily="34" charset="-122"/>
+                <a:cs typeface="Pretendard SemiBold" pitchFamily="34" charset="-120"/>
               </a:rPr>
               <a:t>1학기 결과를 8분 안에 설명할 수 있다</a:t>
             </a:r>
@@ -8800,9 +8800,9 @@
                 <a:solidFill>
                   <a:srgbClr val="111111"/>
                 </a:solidFill>
-                <a:latin typeface="Pretendard Black" pitchFamily="34" charset="0"/>
-                <a:ea typeface="Pretendard Black" pitchFamily="34" charset="-122"/>
-                <a:cs typeface="Pretendard Black" pitchFamily="34" charset="-120"/>
+                <a:latin typeface="Pretendard SemiBold" pitchFamily="34" charset="0"/>
+                <a:ea typeface="Pretendard SemiBold" pitchFamily="34" charset="-122"/>
+                <a:cs typeface="Pretendard SemiBold" pitchFamily="34" charset="-120"/>
               </a:rPr>
               <a:t>이번 학기에 만들 것을 목록으로 안다</a:t>
             </a:r>
@@ -8967,9 +8967,9 @@
                 <a:solidFill>
                   <a:srgbClr val="111111"/>
                 </a:solidFill>
-                <a:latin typeface="Pretendard Black" pitchFamily="34" charset="0"/>
-                <a:ea typeface="Pretendard Black" pitchFamily="34" charset="-122"/>
-                <a:cs typeface="Pretendard Black" pitchFamily="34" charset="-120"/>
+                <a:latin typeface="Pretendard SemiBold" pitchFamily="34" charset="0"/>
+                <a:ea typeface="Pretendard SemiBold" pitchFamily="34" charset="-122"/>
+                <a:cs typeface="Pretendard SemiBold" pitchFamily="34" charset="-120"/>
               </a:rPr>
               <a:t>동료 전원의 프로젝트를 한 번 훑는다</a:t>
             </a:r>
@@ -9134,9 +9134,9 @@
                 <a:solidFill>
                   <a:srgbClr val="111111"/>
                 </a:solidFill>
-                <a:latin typeface="Pretendard Black" pitchFamily="34" charset="0"/>
-                <a:ea typeface="Pretendard Black" pitchFamily="34" charset="-122"/>
-                <a:cs typeface="Pretendard Black" pitchFamily="34" charset="-120"/>
+                <a:latin typeface="Pretendard SemiBold" pitchFamily="34" charset="0"/>
+                <a:ea typeface="Pretendard SemiBold" pitchFamily="34" charset="-122"/>
+                <a:cs typeface="Pretendard SemiBold" pitchFamily="34" charset="-120"/>
               </a:rPr>
               <a:t>15주 마감 세 개를 안다</a:t>
             </a:r>
@@ -9595,9 +9595,9 @@
                 <a:solidFill>
                   <a:srgbClr val="111111"/>
                 </a:solidFill>
-                <a:latin typeface="Pretendard Black" pitchFamily="34" charset="0"/>
-                <a:ea typeface="Pretendard Black" pitchFamily="34" charset="-122"/>
-                <a:cs typeface="Pretendard Black" pitchFamily="34" charset="-120"/>
+                <a:latin typeface="Pretendard SemiBold" pitchFamily="34" charset="0"/>
+                <a:ea typeface="Pretendard SemiBold" pitchFamily="34" charset="-122"/>
+                <a:cs typeface="Pretendard SemiBold" pitchFamily="34" charset="-120"/>
               </a:rPr>
               <a:t>1학기와 2학기는 무엇이 다른가</a:t>
             </a:r>
@@ -9698,9 +9698,9 @@
                 <a:solidFill>
                   <a:srgbClr val="111111"/>
                 </a:solidFill>
-                <a:latin typeface="Pretendard Black" pitchFamily="34" charset="0"/>
-                <a:ea typeface="Pretendard Black" pitchFamily="34" charset="-122"/>
-                <a:cs typeface="Pretendard Black" pitchFamily="34" charset="-120"/>
+                <a:latin typeface="Pretendard SemiBold" pitchFamily="34" charset="0"/>
+                <a:ea typeface="Pretendard SemiBold" pitchFamily="34" charset="-122"/>
+                <a:cs typeface="Pretendard SemiBold" pitchFamily="34" charset="-120"/>
               </a:rPr>
               <a:t>2학기 — 디자이닝</a:t>
             </a:r>
@@ -9762,9 +9762,9 @@
                 <a:solidFill>
                   <a:srgbClr val="9B9B9B"/>
                 </a:solidFill>
-                <a:latin typeface="Pretendard Black" pitchFamily="34" charset="0"/>
-                <a:ea typeface="Pretendard Black" pitchFamily="34" charset="-122"/>
-                <a:cs typeface="Pretendard Black" pitchFamily="34" charset="-120"/>
+                <a:latin typeface="Pretendard SemiBold" pitchFamily="34" charset="0"/>
+                <a:ea typeface="Pretendard SemiBold" pitchFamily="34" charset="-122"/>
+                <a:cs typeface="Pretendard SemiBold" pitchFamily="34" charset="-120"/>
               </a:rPr>
               <a:t>1학기 — 기획</a:t>
             </a:r>
@@ -10915,9 +10915,9 @@
                 <a:solidFill>
                   <a:srgbClr val="111111"/>
                 </a:solidFill>
-                <a:latin typeface="Pretendard Black" pitchFamily="34" charset="0"/>
-                <a:ea typeface="Pretendard Black" pitchFamily="34" charset="-122"/>
-                <a:cs typeface="Pretendard Black" pitchFamily="34" charset="-120"/>
+                <a:latin typeface="Pretendard SemiBold" pitchFamily="34" charset="0"/>
+                <a:ea typeface="Pretendard SemiBold" pitchFamily="34" charset="-122"/>
+                <a:cs typeface="Pretendard SemiBold" pitchFamily="34" charset="-120"/>
               </a:rPr>
               <a:t>2학기 15주 — 네 구간</a:t>
             </a:r>
@@ -11018,9 +11018,9 @@
                 <a:solidFill>
                   <a:srgbClr val="111111"/>
                 </a:solidFill>
-                <a:latin typeface="Pretendard Black" pitchFamily="34" charset="0"/>
-                <a:ea typeface="Pretendard Black" pitchFamily="34" charset="-122"/>
-                <a:cs typeface="Pretendard Black" pitchFamily="34" charset="-120"/>
+                <a:latin typeface="Pretendard SemiBold" pitchFamily="34" charset="0"/>
+                <a:ea typeface="Pretendard SemiBold" pitchFamily="34" charset="-122"/>
+                <a:cs typeface="Pretendard SemiBold" pitchFamily="34" charset="-120"/>
               </a:rPr>
               <a:t>기준 · 2–3주</a:t>
             </a:r>
@@ -11267,9 +11267,9 @@
                 <a:solidFill>
                   <a:srgbClr val="111111"/>
                 </a:solidFill>
-                <a:latin typeface="Pretendard Black" pitchFamily="34" charset="0"/>
-                <a:ea typeface="Pretendard Black" pitchFamily="34" charset="-122"/>
-                <a:cs typeface="Pretendard Black" pitchFamily="34" charset="-120"/>
+                <a:latin typeface="Pretendard SemiBold" pitchFamily="34" charset="0"/>
+                <a:ea typeface="Pretendard SemiBold" pitchFamily="34" charset="-122"/>
+                <a:cs typeface="Pretendard SemiBold" pitchFamily="34" charset="-120"/>
               </a:rPr>
               <a:t>시스템 · 4–6주</a:t>
             </a:r>
@@ -11516,9 +11516,9 @@
                 <a:solidFill>
                   <a:srgbClr val="111111"/>
                 </a:solidFill>
-                <a:latin typeface="Pretendard Black" pitchFamily="34" charset="0"/>
-                <a:ea typeface="Pretendard Black" pitchFamily="34" charset="-122"/>
-                <a:cs typeface="Pretendard Black" pitchFamily="34" charset="-120"/>
+                <a:latin typeface="Pretendard SemiBold" pitchFamily="34" charset="0"/>
+                <a:ea typeface="Pretendard SemiBold" pitchFamily="34" charset="-122"/>
+                <a:cs typeface="Pretendard SemiBold" pitchFamily="34" charset="-120"/>
               </a:rPr>
               <a:t>화면 · 7–11주</a:t>
             </a:r>
@@ -11765,9 +11765,9 @@
                 <a:solidFill>
                   <a:srgbClr val="FFFFFF"/>
                 </a:solidFill>
-                <a:latin typeface="Pretendard Black" pitchFamily="34" charset="0"/>
-                <a:ea typeface="Pretendard Black" pitchFamily="34" charset="-122"/>
-                <a:cs typeface="Pretendard Black" pitchFamily="34" charset="-120"/>
+                <a:latin typeface="Pretendard SemiBold" pitchFamily="34" charset="0"/>
+                <a:ea typeface="Pretendard SemiBold" pitchFamily="34" charset="-122"/>
+                <a:cs typeface="Pretendard SemiBold" pitchFamily="34" charset="-120"/>
               </a:rPr>
               <a:t>패널 · 12–15주</a:t>
             </a:r>
@@ -12333,9 +12333,9 @@
                 <a:solidFill>
                   <a:srgbClr val="1B1B1B"/>
                 </a:solidFill>
-                <a:latin typeface="Pretendard Black" pitchFamily="34" charset="0"/>
-                <a:ea typeface="Pretendard Black" pitchFamily="34" charset="-122"/>
-                <a:cs typeface="Pretendard Black" pitchFamily="34" charset="-120"/>
+                <a:latin typeface="Pretendard SemiBold" pitchFamily="34" charset="0"/>
+                <a:ea typeface="Pretendard SemiBold" pitchFamily="34" charset="-122"/>
+                <a:cs typeface="Pretendard SemiBold" pitchFamily="34" charset="-120"/>
               </a:rPr>
               <a:t>01</a:t>
             </a:r>
@@ -12480,9 +12480,9 @@
                 <a:solidFill>
                   <a:srgbClr val="FFFFFF"/>
                 </a:solidFill>
-                <a:latin typeface="Pretendard Black" pitchFamily="34" charset="0"/>
-                <a:ea typeface="Pretendard Black" pitchFamily="34" charset="-122"/>
-                <a:cs typeface="Pretendard Black" pitchFamily="34" charset="-120"/>
+                <a:latin typeface="Pretendard SemiBold" pitchFamily="34" charset="0"/>
+                <a:ea typeface="Pretendard SemiBold" pitchFamily="34" charset="-122"/>
+                <a:cs typeface="Pretendard SemiBold" pitchFamily="34" charset="-120"/>
               </a:rPr>
               <a:t>개인 발표</a:t>
             </a:r>
@@ -12838,9 +12838,9 @@
                 <a:solidFill>
                   <a:srgbClr val="111111"/>
                 </a:solidFill>
-                <a:latin typeface="Pretendard Black" pitchFamily="34" charset="0"/>
-                <a:ea typeface="Pretendard Black" pitchFamily="34" charset="-122"/>
-                <a:cs typeface="Pretendard Black" pitchFamily="34" charset="-120"/>
+                <a:latin typeface="Pretendard SemiBold" pitchFamily="34" charset="0"/>
+                <a:ea typeface="Pretendard SemiBold" pitchFamily="34" charset="-122"/>
+                <a:cs typeface="Pretendard SemiBold" pitchFamily="34" charset="-120"/>
               </a:rPr>
               <a:t>발표 — 8분</a:t>
             </a:r>
@@ -12941,9 +12941,9 @@
                 <a:solidFill>
                   <a:srgbClr val="111111"/>
                 </a:solidFill>
-                <a:latin typeface="Pretendard Black" pitchFamily="34" charset="0"/>
-                <a:ea typeface="Pretendard Black" pitchFamily="34" charset="-122"/>
-                <a:cs typeface="Pretendard Black" pitchFamily="34" charset="-120"/>
+                <a:latin typeface="Pretendard SemiBold" pitchFamily="34" charset="0"/>
+                <a:ea typeface="Pretendard SemiBold" pitchFamily="34" charset="-122"/>
+                <a:cs typeface="Pretendard SemiBold" pitchFamily="34" charset="-120"/>
               </a:rPr>
               <a:t>말할 것 — 순서대로</a:t>
             </a:r>
@@ -13172,9 +13172,9 @@
                 <a:solidFill>
                   <a:srgbClr val="111111"/>
                 </a:solidFill>
-                <a:latin typeface="Pretendard Black" pitchFamily="34" charset="0"/>
-                <a:ea typeface="Pretendard Black" pitchFamily="34" charset="-122"/>
-                <a:cs typeface="Pretendard Black" pitchFamily="34" charset="-120"/>
+                <a:latin typeface="Pretendard SemiBold" pitchFamily="34" charset="0"/>
+                <a:ea typeface="Pretendard SemiBold" pitchFamily="34" charset="-122"/>
+                <a:cs typeface="Pretendard SemiBold" pitchFamily="34" charset="-120"/>
               </a:rPr>
               <a:t>듣는 사람이 볼 것</a:t>
             </a:r>
@@ -13709,9 +13709,9 @@
                 <a:solidFill>
                   <a:srgbClr val="111111"/>
                 </a:solidFill>
-                <a:latin typeface="Pretendard Black" pitchFamily="34" charset="0"/>
-                <a:ea typeface="Pretendard Black" pitchFamily="34" charset="-122"/>
-                <a:cs typeface="Pretendard Black" pitchFamily="34" charset="-120"/>
+                <a:latin typeface="Pretendard SemiBold" pitchFamily="34" charset="0"/>
+                <a:ea typeface="Pretendard SemiBold" pitchFamily="34" charset="-122"/>
+                <a:cs typeface="Pretendard SemiBold" pitchFamily="34" charset="-120"/>
               </a:rPr>
               <a:t>듣는 사람 기록지</a:t>
             </a:r>
@@ -15219,9 +15219,9 @@
                 <a:solidFill>
                   <a:srgbClr val="FFFFFF"/>
                 </a:solidFill>
-                <a:latin typeface="Pretendard Black" pitchFamily="34" charset="0"/>
-                <a:ea typeface="Pretendard Black" pitchFamily="34" charset="-122"/>
-                <a:cs typeface="Pretendard Black" pitchFamily="34" charset="-120"/>
+                <a:latin typeface="Pretendard SemiBold" pitchFamily="34" charset="0"/>
+                <a:ea typeface="Pretendard SemiBold" pitchFamily="34" charset="-122"/>
+                <a:cs typeface="Pretendard SemiBold" pitchFamily="34" charset="-120"/>
               </a:rPr>
               <a:t>1학기 결론은 흔들지 않습니다.</a:t>
             </a:r>
@@ -15239,9 +15239,9 @@
                 <a:solidFill>
                   <a:srgbClr val="FFFFFF"/>
                 </a:solidFill>
-                <a:latin typeface="Pretendard Black" pitchFamily="34" charset="0"/>
-                <a:ea typeface="Pretendard Black" pitchFamily="34" charset="-122"/>
-                <a:cs typeface="Pretendard Black" pitchFamily="34" charset="-120"/>
+                <a:latin typeface="Pretendard SemiBold" pitchFamily="34" charset="0"/>
+                <a:ea typeface="Pretendard SemiBold" pitchFamily="34" charset="-122"/>
+                <a:cs typeface="Pretendard SemiBold" pitchFamily="34" charset="-120"/>
               </a:rPr>
               <a:t>이번 학기에 바꿀 것은 '어떻게 보이는가'입니다.</a:t>
             </a:r>
@@ -15572,9 +15572,9 @@
                 <a:solidFill>
                   <a:srgbClr val="111111"/>
                 </a:solidFill>
-                <a:latin typeface="Pretendard Black" pitchFamily="34" charset="0"/>
-                <a:ea typeface="Pretendard Black" pitchFamily="34" charset="-122"/>
-                <a:cs typeface="Pretendard Black" pitchFamily="34" charset="-120"/>
+                <a:latin typeface="Pretendard SemiBold" pitchFamily="34" charset="0"/>
+                <a:ea typeface="Pretendard SemiBold" pitchFamily="34" charset="-122"/>
+                <a:cs typeface="Pretendard SemiBold" pitchFamily="34" charset="-120"/>
               </a:rPr>
               <a:t>1학기 결과물에서 반복해서 보이는 것</a:t>
             </a:r>
@@ -15739,9 +15739,9 @@
                 <a:solidFill>
                   <a:srgbClr val="111111"/>
                 </a:solidFill>
-                <a:latin typeface="Pretendard Black" pitchFamily="34" charset="0"/>
-                <a:ea typeface="Pretendard Black" pitchFamily="34" charset="-122"/>
-                <a:cs typeface="Pretendard Black" pitchFamily="34" charset="-120"/>
+                <a:latin typeface="Pretendard SemiBold" pitchFamily="34" charset="0"/>
+                <a:ea typeface="Pretendard SemiBold" pitchFamily="34" charset="-122"/>
+                <a:cs typeface="Pretendard SemiBold" pitchFamily="34" charset="-120"/>
               </a:rPr>
               <a:t>화면마다 규격이 다르다</a:t>
             </a:r>
@@ -15945,9 +15945,9 @@
                 <a:solidFill>
                   <a:srgbClr val="111111"/>
                 </a:solidFill>
-                <a:latin typeface="Pretendard Black" pitchFamily="34" charset="0"/>
-                <a:ea typeface="Pretendard Black" pitchFamily="34" charset="-122"/>
-                <a:cs typeface="Pretendard Black" pitchFamily="34" charset="-120"/>
+                <a:latin typeface="Pretendard SemiBold" pitchFamily="34" charset="0"/>
+                <a:ea typeface="Pretendard SemiBold" pitchFamily="34" charset="-122"/>
+                <a:cs typeface="Pretendard SemiBold" pitchFamily="34" charset="-120"/>
               </a:rPr>
               <a:t>같은 요소를 여러 번 그렸다</a:t>
             </a:r>
@@ -16151,9 +16151,9 @@
                 <a:solidFill>
                   <a:srgbClr val="111111"/>
                 </a:solidFill>
-                <a:latin typeface="Pretendard Black" pitchFamily="34" charset="0"/>
-                <a:ea typeface="Pretendard Black" pitchFamily="34" charset="-122"/>
-                <a:cs typeface="Pretendard Black" pitchFamily="34" charset="-120"/>
+                <a:latin typeface="Pretendard SemiBold" pitchFamily="34" charset="0"/>
+                <a:ea typeface="Pretendard SemiBold" pitchFamily="34" charset="-122"/>
+                <a:cs typeface="Pretendard SemiBold" pitchFamily="34" charset="-120"/>
               </a:rPr>
               <a:t>색과 글자 크기가 그때그때 정해졌다</a:t>
             </a:r>
@@ -16357,9 +16357,9 @@
                 <a:solidFill>
                   <a:srgbClr val="111111"/>
                 </a:solidFill>
-                <a:latin typeface="Pretendard Black" pitchFamily="34" charset="0"/>
-                <a:ea typeface="Pretendard Black" pitchFamily="34" charset="-122"/>
-                <a:cs typeface="Pretendard Black" pitchFamily="34" charset="-120"/>
+                <a:latin typeface="Pretendard SemiBold" pitchFamily="34" charset="0"/>
+                <a:ea typeface="Pretendard SemiBold" pitchFamily="34" charset="-122"/>
+                <a:cs typeface="Pretendard SemiBold" pitchFamily="34" charset="-120"/>
               </a:rPr>
               <a:t>정상 화면만 있다</a:t>
             </a:r>
@@ -16563,9 +16563,9 @@
                 <a:solidFill>
                   <a:srgbClr val="111111"/>
                 </a:solidFill>
-                <a:latin typeface="Pretendard Black" pitchFamily="34" charset="0"/>
-                <a:ea typeface="Pretendard Black" pitchFamily="34" charset="-122"/>
-                <a:cs typeface="Pretendard Black" pitchFamily="34" charset="-120"/>
+                <a:latin typeface="Pretendard SemiBold" pitchFamily="34" charset="0"/>
+                <a:ea typeface="Pretendard SemiBold" pitchFamily="34" charset="-122"/>
+                <a:cs typeface="Pretendard SemiBold" pitchFamily="34" charset="-120"/>
               </a:rPr>
               <a:t>패널을 염두에 둔 이미지가 없다</a:t>
             </a:r>
